--- a/Schools_ML_Track/camp_2026/slides/ML/ML14.pptx
+++ b/Schools_ML_Track/camp_2026/slides/ML/ML14.pptx
@@ -128,7 +128,7 @@
   <p:extLst>
     <p:ext uri="{521415D9-36F7-43E2-AB2F-B90AF26B5E84}">
       <p14:sectionLst xmlns:p14="http://schemas.microsoft.com/office/powerpoint/2010/main">
-        <p14:section name="Opening" id="{20211f01-7a48-48dd-58b4-9827fe2f6496}">
+        <p14:section name="Opening" id="{f473d0e7-bea7-6d89-d8d5-94db738d3e7f}">
           <p14:sldIdLst>
             <p14:sldId id="256"/>
             <p14:sldId id="257"/>
@@ -139,7 +139,7 @@
             <p14:sldId id="262"/>
           </p14:sldIdLst>
         </p14:section>
-        <p14:section name="Block A" id="{812f4cbf-5cb4-e639-c930-9acaac003c2d}">
+        <p14:section name="Block A" id="{1a89c573-f8bd-00f9-21f8-1951a3cb25f7}">
           <p14:sldIdLst>
             <p14:sldId id="263"/>
             <p14:sldId id="264"/>
@@ -149,15 +149,15 @@
             <p14:sldId id="269"/>
           </p14:sldIdLst>
         </p14:section>
-        <p14:section name="Break" id="{e855bcb1-ad01-6578-df24-3e9b1bb268b1}">
+        <p14:section name="Break" id="{d7ff271e-0255-3eee-9c0f-bff1958bce00}">
           <p14:sldIdLst>
             <p14:sldId id="267"/>
           </p14:sldIdLst>
         </p14:section>
-        <p14:section name="Block A" id="{e93159b0-f5bf-6712-7f49-95a6de21247b}">
+        <p14:section name="Block A" id="{b5638696-be06-d154-92a4-8623cb523609}">
           <p14:sldIdLst/>
         </p14:section>
-        <p14:section name="Block B" id="{03c56728-63ed-d329-2aa7-b9f4d925a268}">
+        <p14:section name="Block B" id="{9b86be5f-e5c9-671d-1b73-cae91a5a26d7}">
           <p14:sldIdLst>
             <p14:sldId id="270"/>
             <p14:sldId id="271"/>
@@ -166,7 +166,7 @@
             <p14:sldId id="274"/>
           </p14:sldIdLst>
         </p14:section>
-        <p14:section name="Make and close" id="{521ec122-d5c5-920e-9a4d-e6330c99009d}">
+        <p14:section name="Make and close" id="{f9dfbb6f-52f2-1e5d-1847-2f9fbc4c711c}">
           <p14:sldIdLst>
             <p14:sldId id="275"/>
             <p14:sldId id="276"/>

--- a/Schools_ML_Track/camp_2026/slides/ML/ML14.pptx
+++ b/Schools_ML_Track/camp_2026/slides/ML/ML14.pptx
@@ -128,7 +128,7 @@
   <p:extLst>
     <p:ext uri="{521415D9-36F7-43E2-AB2F-B90AF26B5E84}">
       <p14:sectionLst xmlns:p14="http://schemas.microsoft.com/office/powerpoint/2010/main">
-        <p14:section name="Opening" id="{f473d0e7-bea7-6d89-d8d5-94db738d3e7f}">
+        <p14:section name="Opening" id="{75e49d07-df5d-5c46-1caa-65675d929428}">
           <p14:sldIdLst>
             <p14:sldId id="256"/>
             <p14:sldId id="257"/>
@@ -139,7 +139,7 @@
             <p14:sldId id="262"/>
           </p14:sldIdLst>
         </p14:section>
-        <p14:section name="Block A" id="{1a89c573-f8bd-00f9-21f8-1951a3cb25f7}">
+        <p14:section name="Block A" id="{644fd420-83e6-84b0-fd36-0336c574d425}">
           <p14:sldIdLst>
             <p14:sldId id="263"/>
             <p14:sldId id="264"/>
@@ -149,15 +149,15 @@
             <p14:sldId id="269"/>
           </p14:sldIdLst>
         </p14:section>
-        <p14:section name="Break" id="{d7ff271e-0255-3eee-9c0f-bff1958bce00}">
+        <p14:section name="Break" id="{c19890ce-9de0-4924-b5d9-68321bd762bd}">
           <p14:sldIdLst>
             <p14:sldId id="267"/>
           </p14:sldIdLst>
         </p14:section>
-        <p14:section name="Block A" id="{b5638696-be06-d154-92a4-8623cb523609}">
+        <p14:section name="Block A" id="{8cc56daa-16df-b5da-dcfe-7f1cd7402961}">
           <p14:sldIdLst/>
         </p14:section>
-        <p14:section name="Block B" id="{9b86be5f-e5c9-671d-1b73-cae91a5a26d7}">
+        <p14:section name="Block B" id="{57b33b11-98f4-108e-c6dc-ee43a25d24a5}">
           <p14:sldIdLst>
             <p14:sldId id="270"/>
             <p14:sldId id="271"/>
@@ -166,7 +166,7 @@
             <p14:sldId id="274"/>
           </p14:sldIdLst>
         </p14:section>
-        <p14:section name="Make and close" id="{f9dfbb6f-52f2-1e5d-1847-2f9fbc4c711c}">
+        <p14:section name="Make and close" id="{c11e7b3d-53f7-7283-9544-5190568df61a}">
           <p14:sldIdLst>
             <p14:sldId id="275"/>
             <p14:sldId id="276"/>
@@ -3373,399 +3373,40 @@
           </a:p>
         </p:txBody>
       </p:sp>
-      <p:sp>
-        <p:nvSpPr>
-          <p:cNvPr id="3" name="Shape 1"/>
-          <p:cNvSpPr/>
+      <p:pic>
+        <p:nvPicPr>
+          <p:cNvPr id="3" name="Image 0" descr="Look closely">    </p:cNvPr>
+          <p:cNvPicPr>
+            <a:picLocks noChangeAspect="1"/>
+          </p:cNvPicPr>
           <p:nvPr/>
-        </p:nvSpPr>
-        <p:spPr>
-          <a:xfrm>
-            <a:off x="7498080" y="1737360"/>
-            <a:ext cx="4023360" cy="2981452"/>
-          </a:xfrm>
-          <a:prstGeom prst="roundRect">
-            <a:avLst>
-              <a:gd name="adj" fmla="val 2454"/>
-            </a:avLst>
-          </a:prstGeom>
-          <a:solidFill>
-            <a:srgbClr val="111111"/>
-          </a:solidFill>
-          <a:ln/>
-        </p:spPr>
-      </p:sp>
-      <p:sp>
-        <p:nvSpPr>
-          <p:cNvPr id="4" name="Text 2"/>
+        </p:nvPicPr>
+        <p:blipFill>
+          <a:blip r:embed="rId1"/>
+          <a:stretch>
+            <a:fillRect/>
+          </a:stretch>
+        </p:blipFill>
+        <p:spPr>
+          <a:xfrm>
+            <a:off x="9875520" y="4480560"/>
+            <a:ext cx="1645920" cy="1645920"/>
+          </a:xfrm>
+          <a:prstGeom prst="rect">
+            <a:avLst/>
+          </a:prstGeom>
+        </p:spPr>
+      </p:pic>
+      <p:sp>
+        <p:nvSpPr>
+          <p:cNvPr id="4" name="Text 1"/>
           <p:cNvSpPr txBox="1"/>
           <p:nvPr/>
         </p:nvSpPr>
         <p:spPr>
           <a:xfrm>
-            <a:off x="7699248" y="1938528"/>
-            <a:ext cx="3621024" cy="2579116"/>
-          </a:xfrm>
-          <a:prstGeom prst="rect">
-            <a:avLst/>
-          </a:prstGeom>
-          <a:noFill/>
-          <a:ln/>
-        </p:spPr>
-        <p:txBody>
-          <a:bodyPr wrap="square" lIns="0" tIns="0" rIns="0" bIns="0" rtlCol="0" anchor="t"/>
-          <a:lstStyle/>
-          <a:p>
-            <a:pPr algn="l" indent="0" marL="0">
-              <a:lnSpc>
-                <a:spcPts val="1820"/>
-              </a:lnSpc>
-              <a:buNone/>
-            </a:pPr>
-            <a:r>
-              <a:rPr lang="en-US" sz="1400" b="1" dirty="0">
-                <a:solidFill>
-                  <a:srgbClr val="FFFFFF"/>
-                </a:solidFill>
-                <a:latin typeface="Courier New" pitchFamily="34" charset="0"/>
-                <a:ea typeface="Courier New" pitchFamily="34" charset="-122"/>
-                <a:cs typeface="Courier New" pitchFamily="34" charset="-120"/>
-              </a:rPr>
-              <a:t>import</a:t>
-            </a:r>
-            <a:pPr algn="l" indent="0" marL="0">
-              <a:lnSpc>
-                <a:spcPts val="1820"/>
-              </a:lnSpc>
-              <a:buNone/>
-            </a:pPr>
-            <a:r>
-              <a:rPr lang="en-US" sz="1400" dirty="0">
-                <a:solidFill>
-                  <a:srgbClr val="FFFFFF"/>
-                </a:solidFill>
-                <a:latin typeface="Courier New" pitchFamily="34" charset="0"/>
-                <a:ea typeface="Courier New" pitchFamily="34" charset="-122"/>
-                <a:cs typeface="Courier New" pitchFamily="34" charset="-120"/>
-              </a:rPr>
-              <a:t> pandas </a:t>
-            </a:r>
-            <a:pPr algn="l" indent="0" marL="0">
-              <a:lnSpc>
-                <a:spcPts val="1820"/>
-              </a:lnSpc>
-              <a:buNone/>
-            </a:pPr>
-            <a:r>
-              <a:rPr lang="en-US" sz="1400" b="1" dirty="0">
-                <a:solidFill>
-                  <a:srgbClr val="FFFFFF"/>
-                </a:solidFill>
-                <a:latin typeface="Courier New" pitchFamily="34" charset="0"/>
-                <a:ea typeface="Courier New" pitchFamily="34" charset="-122"/>
-                <a:cs typeface="Courier New" pitchFamily="34" charset="-120"/>
-              </a:rPr>
-              <a:t>as</a:t>
-            </a:r>
-            <a:pPr algn="l" indent="0" marL="0">
-              <a:lnSpc>
-                <a:spcPts val="1820"/>
-              </a:lnSpc>
-              <a:buNone/>
-            </a:pPr>
-            <a:r>
-              <a:rPr lang="en-US" sz="1400" dirty="0">
-                <a:solidFill>
-                  <a:srgbClr val="FFFFFF"/>
-                </a:solidFill>
-                <a:latin typeface="Courier New" pitchFamily="34" charset="0"/>
-                <a:ea typeface="Courier New" pitchFamily="34" charset="-122"/>
-                <a:cs typeface="Courier New" pitchFamily="34" charset="-120"/>
-              </a:rPr>
-              <a:t> pd</a:t>
-            </a:r>
-            <a:endParaRPr lang="en-US" sz="1400" dirty="0"/>
-          </a:p>
-          <a:p>
-            <a:pPr algn="l" indent="0" marL="0">
-              <a:lnSpc>
-                <a:spcPts val="1820"/>
-              </a:lnSpc>
-              <a:buNone/>
-            </a:pPr>
-            <a:r>
-              <a:rPr lang="en-US" sz="1400" dirty="0">
-                <a:solidFill>
-                  <a:srgbClr val="FFFFFF"/>
-                </a:solidFill>
-                <a:latin typeface="Courier New" pitchFamily="34" charset="0"/>
-                <a:ea typeface="Courier New" pitchFamily="34" charset="-122"/>
-                <a:cs typeface="Courier New" pitchFamily="34" charset="-120"/>
-              </a:rPr>
-              <a:t>homes = pd.read_csv(</a:t>
-            </a:r>
-            <a:endParaRPr lang="en-US" sz="1400" dirty="0"/>
-          </a:p>
-          <a:p>
-            <a:pPr algn="l" indent="0" marL="0">
-              <a:lnSpc>
-                <a:spcPts val="1820"/>
-              </a:lnSpc>
-              <a:buNone/>
-            </a:pPr>
-            <a:r>
-              <a:rPr lang="en-US" sz="1400" dirty="0">
-                <a:solidFill>
-                  <a:srgbClr val="FFFFFF"/>
-                </a:solidFill>
-                <a:latin typeface="Courier New" pitchFamily="34" charset="0"/>
-                <a:ea typeface="Courier New" pitchFamily="34" charset="-122"/>
-                <a:cs typeface="Courier New" pitchFamily="34" charset="-120"/>
-              </a:rPr>
-              <a:t>    </a:t>
-            </a:r>
-            <a:pPr algn="l" indent="0" marL="0">
-              <a:lnSpc>
-                <a:spcPts val="1820"/>
-              </a:lnSpc>
-              <a:buNone/>
-            </a:pPr>
-            <a:r>
-              <a:rPr lang="en-US" sz="1400" dirty="0">
-                <a:solidFill>
-                  <a:srgbClr val="E0BE36"/>
-                </a:solidFill>
-                <a:latin typeface="Courier New" pitchFamily="34" charset="0"/>
-                <a:ea typeface="Courier New" pitchFamily="34" charset="-122"/>
-                <a:cs typeface="Courier New" pitchFamily="34" charset="-120"/>
-              </a:rPr>
-              <a:t>"synthetic_homes.csv"</a:t>
-            </a:r>
-            <a:endParaRPr lang="en-US" sz="1400" dirty="0"/>
-          </a:p>
-          <a:p>
-            <a:pPr algn="l" indent="0" marL="0">
-              <a:lnSpc>
-                <a:spcPts val="1820"/>
-              </a:lnSpc>
-              <a:buNone/>
-            </a:pPr>
-            <a:r>
-              <a:rPr lang="en-US" sz="1400" dirty="0">
-                <a:solidFill>
-                  <a:srgbClr val="FFFFFF"/>
-                </a:solidFill>
-                <a:latin typeface="Courier New" pitchFamily="34" charset="0"/>
-                <a:ea typeface="Courier New" pitchFamily="34" charset="-122"/>
-                <a:cs typeface="Courier New" pitchFamily="34" charset="-120"/>
-              </a:rPr>
-              <a:t>).head(8)</a:t>
-            </a:r>
-            <a:endParaRPr lang="en-US" sz="1400" dirty="0"/>
-          </a:p>
-          <a:p>
-            <a:pPr algn="l" indent="0" marL="0">
-              <a:lnSpc>
-                <a:spcPts val="1820"/>
-              </a:lnSpc>
-              <a:buNone/>
-            </a:pPr>
-            <a:r>
-              <a:rPr lang="en-US" sz="1400" dirty="0">
-                <a:solidFill>
-                  <a:srgbClr val="FFFFFF"/>
-                </a:solidFill>
-                <a:latin typeface="Courier New" pitchFamily="34" charset="0"/>
-                <a:ea typeface="Courier New" pitchFamily="34" charset="-122"/>
-                <a:cs typeface="Courier New" pitchFamily="34" charset="-120"/>
-              </a:rPr>
-              <a:t>guess = 100000 + 3000 * homes[</a:t>
-            </a:r>
-            <a:endParaRPr lang="en-US" sz="1400" dirty="0"/>
-          </a:p>
-          <a:p>
-            <a:pPr algn="l" indent="0" marL="0">
-              <a:lnSpc>
-                <a:spcPts val="1820"/>
-              </a:lnSpc>
-              <a:buNone/>
-            </a:pPr>
-            <a:r>
-              <a:rPr lang="en-US" sz="1400" dirty="0">
-                <a:solidFill>
-                  <a:srgbClr val="FFFFFF"/>
-                </a:solidFill>
-                <a:latin typeface="Courier New" pitchFamily="34" charset="0"/>
-                <a:ea typeface="Courier New" pitchFamily="34" charset="-122"/>
-                <a:cs typeface="Courier New" pitchFamily="34" charset="-120"/>
-              </a:rPr>
-              <a:t>    </a:t>
-            </a:r>
-            <a:pPr algn="l" indent="0" marL="0">
-              <a:lnSpc>
-                <a:spcPts val="1820"/>
-              </a:lnSpc>
-              <a:buNone/>
-            </a:pPr>
-            <a:r>
-              <a:rPr lang="en-US" sz="1400" dirty="0">
-                <a:solidFill>
-                  <a:srgbClr val="E0BE36"/>
-                </a:solidFill>
-                <a:latin typeface="Courier New" pitchFamily="34" charset="0"/>
-                <a:ea typeface="Courier New" pitchFamily="34" charset="-122"/>
-                <a:cs typeface="Courier New" pitchFamily="34" charset="-120"/>
-              </a:rPr>
-              <a:t>"area_m2"</a:t>
-            </a:r>
-            <a:endParaRPr lang="en-US" sz="1400" dirty="0"/>
-          </a:p>
-          <a:p>
-            <a:pPr algn="l" indent="0" marL="0">
-              <a:lnSpc>
-                <a:spcPts val="1820"/>
-              </a:lnSpc>
-              <a:buNone/>
-            </a:pPr>
-            <a:r>
-              <a:rPr lang="en-US" sz="1400" dirty="0">
-                <a:solidFill>
-                  <a:srgbClr val="FFFFFF"/>
-                </a:solidFill>
-                <a:latin typeface="Courier New" pitchFamily="34" charset="0"/>
-                <a:ea typeface="Courier New" pitchFamily="34" charset="-122"/>
-                <a:cs typeface="Courier New" pitchFamily="34" charset="-120"/>
-              </a:rPr>
-              <a:t>]</a:t>
-            </a:r>
-            <a:endParaRPr lang="en-US" sz="1400" dirty="0"/>
-          </a:p>
-          <a:p>
-            <a:pPr algn="l" indent="0" marL="0">
-              <a:lnSpc>
-                <a:spcPts val="1820"/>
-              </a:lnSpc>
-              <a:buNone/>
-            </a:pPr>
-            <a:r>
-              <a:rPr lang="en-US" sz="1400" dirty="0">
-                <a:solidFill>
-                  <a:srgbClr val="FFFFFF"/>
-                </a:solidFill>
-                <a:latin typeface="Courier New" pitchFamily="34" charset="0"/>
-                <a:ea typeface="Courier New" pitchFamily="34" charset="-122"/>
-                <a:cs typeface="Courier New" pitchFamily="34" charset="-120"/>
-              </a:rPr>
-              <a:t>errors = (</a:t>
-            </a:r>
-            <a:endParaRPr lang="en-US" sz="1400" dirty="0"/>
-          </a:p>
-          <a:p>
-            <a:pPr algn="l" indent="0" marL="0">
-              <a:lnSpc>
-                <a:spcPts val="1820"/>
-              </a:lnSpc>
-              <a:buNone/>
-            </a:pPr>
-            <a:r>
-              <a:rPr lang="en-US" sz="1400" dirty="0">
-                <a:solidFill>
-                  <a:srgbClr val="FFFFFF"/>
-                </a:solidFill>
-                <a:latin typeface="Courier New" pitchFamily="34" charset="0"/>
-                <a:ea typeface="Courier New" pitchFamily="34" charset="-122"/>
-                <a:cs typeface="Courier New" pitchFamily="34" charset="-120"/>
-              </a:rPr>
-              <a:t>    homes[</a:t>
-            </a:r>
-            <a:pPr algn="l" indent="0" marL="0">
-              <a:lnSpc>
-                <a:spcPts val="1820"/>
-              </a:lnSpc>
-              <a:buNone/>
-            </a:pPr>
-            <a:r>
-              <a:rPr lang="en-US" sz="1400" dirty="0">
-                <a:solidFill>
-                  <a:srgbClr val="E0BE36"/>
-                </a:solidFill>
-                <a:latin typeface="Courier New" pitchFamily="34" charset="0"/>
-                <a:ea typeface="Courier New" pitchFamily="34" charset="-122"/>
-                <a:cs typeface="Courier New" pitchFamily="34" charset="-120"/>
-              </a:rPr>
-              <a:t>"rent_ugx"</a:t>
-            </a:r>
-            <a:pPr algn="l" indent="0" marL="0">
-              <a:lnSpc>
-                <a:spcPts val="1820"/>
-              </a:lnSpc>
-              <a:buNone/>
-            </a:pPr>
-            <a:r>
-              <a:rPr lang="en-US" sz="1400" dirty="0">
-                <a:solidFill>
-                  <a:srgbClr val="FFFFFF"/>
-                </a:solidFill>
-                <a:latin typeface="Courier New" pitchFamily="34" charset="0"/>
-                <a:ea typeface="Courier New" pitchFamily="34" charset="-122"/>
-                <a:cs typeface="Courier New" pitchFamily="34" charset="-120"/>
-              </a:rPr>
-              <a:t>] - guess</a:t>
-            </a:r>
-            <a:endParaRPr lang="en-US" sz="1400" dirty="0"/>
-          </a:p>
-          <a:p>
-            <a:pPr algn="l" indent="0" marL="0">
-              <a:lnSpc>
-                <a:spcPts val="1820"/>
-              </a:lnSpc>
-              <a:buNone/>
-            </a:pPr>
-            <a:r>
-              <a:rPr lang="en-US" sz="1400" dirty="0">
-                <a:solidFill>
-                  <a:srgbClr val="FFFFFF"/>
-                </a:solidFill>
-                <a:latin typeface="Courier New" pitchFamily="34" charset="0"/>
-                <a:ea typeface="Courier New" pitchFamily="34" charset="-122"/>
-                <a:cs typeface="Courier New" pitchFamily="34" charset="-120"/>
-              </a:rPr>
-              <a:t>).abs()</a:t>
-            </a:r>
-            <a:endParaRPr lang="en-US" sz="1400" dirty="0"/>
-          </a:p>
-          <a:p>
-            <a:pPr algn="l" indent="0" marL="0">
-              <a:lnSpc>
-                <a:spcPts val="1820"/>
-              </a:lnSpc>
-              <a:buNone/>
-            </a:pPr>
-            <a:r>
-              <a:rPr lang="en-US" sz="1400" dirty="0">
-                <a:solidFill>
-                  <a:srgbClr val="FFFFFF"/>
-                </a:solidFill>
-                <a:latin typeface="Courier New" pitchFamily="34" charset="0"/>
-                <a:ea typeface="Courier New" pitchFamily="34" charset="-122"/>
-                <a:cs typeface="Courier New" pitchFamily="34" charset="-120"/>
-              </a:rPr>
-              <a:t>print(errors.mean())</a:t>
-            </a:r>
-            <a:endParaRPr lang="en-US" sz="1400" dirty="0"/>
-          </a:p>
-        </p:txBody>
-      </p:sp>
-      <p:sp>
-        <p:nvSpPr>
-          <p:cNvPr id="5" name="Text 3"/>
-          <p:cNvSpPr txBox="1"/>
-          <p:nvPr/>
-        </p:nvSpPr>
-        <p:spPr>
-          <a:xfrm>
             <a:off x="640080" y="1737360"/>
-            <a:ext cx="6400800" cy="4389120"/>
+            <a:ext cx="8961120" cy="4389120"/>
           </a:xfrm>
           <a:prstGeom prst="rect">
             <a:avLst/>
@@ -4006,389 +3647,30 @@
           </a:p>
         </p:txBody>
       </p:sp>
-      <p:sp>
-        <p:nvSpPr>
-          <p:cNvPr id="4" name="Shape 2"/>
-          <p:cNvSpPr/>
+      <p:pic>
+        <p:nvPicPr>
+          <p:cNvPr id="4" name="Image 0" descr="Change one thing">    </p:cNvPr>
+          <p:cNvPicPr>
+            <a:picLocks noChangeAspect="1"/>
+          </p:cNvPicPr>
           <p:nvPr/>
-        </p:nvSpPr>
-        <p:spPr>
-          <a:xfrm>
-            <a:off x="7223760" y="1737360"/>
-            <a:ext cx="4297680" cy="3163062"/>
-          </a:xfrm>
-          <a:prstGeom prst="roundRect">
-            <a:avLst>
-              <a:gd name="adj" fmla="val 2313"/>
-            </a:avLst>
-          </a:prstGeom>
-          <a:solidFill>
-            <a:srgbClr val="111111"/>
-          </a:solidFill>
-          <a:ln/>
-        </p:spPr>
-      </p:sp>
-      <p:sp>
-        <p:nvSpPr>
-          <p:cNvPr id="5" name="Text 3"/>
-          <p:cNvSpPr txBox="1"/>
-          <p:nvPr/>
-        </p:nvSpPr>
-        <p:spPr>
-          <a:xfrm>
-            <a:off x="7424928" y="1938528"/>
-            <a:ext cx="3895344" cy="2760726"/>
-          </a:xfrm>
-          <a:prstGeom prst="rect">
-            <a:avLst/>
-          </a:prstGeom>
-          <a:noFill/>
-          <a:ln/>
-        </p:spPr>
-        <p:txBody>
-          <a:bodyPr wrap="square" lIns="0" tIns="0" rIns="0" bIns="0" rtlCol="0" anchor="t"/>
-          <a:lstStyle/>
-          <a:p>
-            <a:pPr algn="l" indent="0" marL="0">
-              <a:lnSpc>
-                <a:spcPts val="1950"/>
-              </a:lnSpc>
-              <a:buNone/>
-            </a:pPr>
-            <a:r>
-              <a:rPr lang="en-US" sz="1500" b="1" dirty="0">
-                <a:solidFill>
-                  <a:srgbClr val="FFFFFF"/>
-                </a:solidFill>
-                <a:latin typeface="Courier New" pitchFamily="34" charset="0"/>
-                <a:ea typeface="Courier New" pitchFamily="34" charset="-122"/>
-                <a:cs typeface="Courier New" pitchFamily="34" charset="-120"/>
-              </a:rPr>
-              <a:t>import</a:t>
-            </a:r>
-            <a:pPr algn="l" indent="0" marL="0">
-              <a:lnSpc>
-                <a:spcPts val="1950"/>
-              </a:lnSpc>
-              <a:buNone/>
-            </a:pPr>
-            <a:r>
-              <a:rPr lang="en-US" sz="1500" dirty="0">
-                <a:solidFill>
-                  <a:srgbClr val="FFFFFF"/>
-                </a:solidFill>
-                <a:latin typeface="Courier New" pitchFamily="34" charset="0"/>
-                <a:ea typeface="Courier New" pitchFamily="34" charset="-122"/>
-                <a:cs typeface="Courier New" pitchFamily="34" charset="-120"/>
-              </a:rPr>
-              <a:t> pandas </a:t>
-            </a:r>
-            <a:pPr algn="l" indent="0" marL="0">
-              <a:lnSpc>
-                <a:spcPts val="1950"/>
-              </a:lnSpc>
-              <a:buNone/>
-            </a:pPr>
-            <a:r>
-              <a:rPr lang="en-US" sz="1500" b="1" dirty="0">
-                <a:solidFill>
-                  <a:srgbClr val="FFFFFF"/>
-                </a:solidFill>
-                <a:latin typeface="Courier New" pitchFamily="34" charset="0"/>
-                <a:ea typeface="Courier New" pitchFamily="34" charset="-122"/>
-                <a:cs typeface="Courier New" pitchFamily="34" charset="-120"/>
-              </a:rPr>
-              <a:t>as</a:t>
-            </a:r>
-            <a:pPr algn="l" indent="0" marL="0">
-              <a:lnSpc>
-                <a:spcPts val="1950"/>
-              </a:lnSpc>
-              <a:buNone/>
-            </a:pPr>
-            <a:r>
-              <a:rPr lang="en-US" sz="1500" dirty="0">
-                <a:solidFill>
-                  <a:srgbClr val="FFFFFF"/>
-                </a:solidFill>
-                <a:latin typeface="Courier New" pitchFamily="34" charset="0"/>
-                <a:ea typeface="Courier New" pitchFamily="34" charset="-122"/>
-                <a:cs typeface="Courier New" pitchFamily="34" charset="-120"/>
-              </a:rPr>
-              <a:t> pd</a:t>
-            </a:r>
-            <a:endParaRPr lang="en-US" sz="1500" dirty="0"/>
-          </a:p>
-          <a:p>
-            <a:pPr algn="l" indent="0" marL="0">
-              <a:lnSpc>
-                <a:spcPts val="1950"/>
-              </a:lnSpc>
-              <a:buNone/>
-            </a:pPr>
-            <a:r>
-              <a:rPr lang="en-US" sz="1500" dirty="0">
-                <a:solidFill>
-                  <a:srgbClr val="FFFFFF"/>
-                </a:solidFill>
-                <a:latin typeface="Courier New" pitchFamily="34" charset="0"/>
-                <a:ea typeface="Courier New" pitchFamily="34" charset="-122"/>
-                <a:cs typeface="Courier New" pitchFamily="34" charset="-120"/>
-              </a:rPr>
-              <a:t>homes = pd.read_csv(</a:t>
-            </a:r>
-            <a:endParaRPr lang="en-US" sz="1500" dirty="0"/>
-          </a:p>
-          <a:p>
-            <a:pPr algn="l" indent="0" marL="0">
-              <a:lnSpc>
-                <a:spcPts val="1950"/>
-              </a:lnSpc>
-              <a:buNone/>
-            </a:pPr>
-            <a:r>
-              <a:rPr lang="en-US" sz="1500" dirty="0">
-                <a:solidFill>
-                  <a:srgbClr val="FFFFFF"/>
-                </a:solidFill>
-                <a:latin typeface="Courier New" pitchFamily="34" charset="0"/>
-                <a:ea typeface="Courier New" pitchFamily="34" charset="-122"/>
-                <a:cs typeface="Courier New" pitchFamily="34" charset="-120"/>
-              </a:rPr>
-              <a:t>    </a:t>
-            </a:r>
-            <a:pPr algn="l" indent="0" marL="0">
-              <a:lnSpc>
-                <a:spcPts val="1950"/>
-              </a:lnSpc>
-              <a:buNone/>
-            </a:pPr>
-            <a:r>
-              <a:rPr lang="en-US" sz="1500" dirty="0">
-                <a:solidFill>
-                  <a:srgbClr val="E0BE36"/>
-                </a:solidFill>
-                <a:latin typeface="Courier New" pitchFamily="34" charset="0"/>
-                <a:ea typeface="Courier New" pitchFamily="34" charset="-122"/>
-                <a:cs typeface="Courier New" pitchFamily="34" charset="-120"/>
-              </a:rPr>
-              <a:t>"synthetic_homes.csv"</a:t>
-            </a:r>
-            <a:endParaRPr lang="en-US" sz="1500" dirty="0"/>
-          </a:p>
-          <a:p>
-            <a:pPr algn="l" indent="0" marL="0">
-              <a:lnSpc>
-                <a:spcPts val="1950"/>
-              </a:lnSpc>
-              <a:buNone/>
-            </a:pPr>
-            <a:r>
-              <a:rPr lang="en-US" sz="1500" dirty="0">
-                <a:solidFill>
-                  <a:srgbClr val="FFFFFF"/>
-                </a:solidFill>
-                <a:latin typeface="Courier New" pitchFamily="34" charset="0"/>
-                <a:ea typeface="Courier New" pitchFamily="34" charset="-122"/>
-                <a:cs typeface="Courier New" pitchFamily="34" charset="-120"/>
-              </a:rPr>
-              <a:t>).head(8)</a:t>
-            </a:r>
-            <a:endParaRPr lang="en-US" sz="1500" dirty="0"/>
-          </a:p>
-          <a:p>
-            <a:pPr algn="l" indent="0" marL="0">
-              <a:lnSpc>
-                <a:spcPts val="1950"/>
-              </a:lnSpc>
-              <a:buNone/>
-            </a:pPr>
-            <a:r>
-              <a:rPr lang="en-US" sz="1500" dirty="0">
-                <a:solidFill>
-                  <a:srgbClr val="FFFFFF"/>
-                </a:solidFill>
-                <a:latin typeface="Courier New" pitchFamily="34" charset="0"/>
-                <a:ea typeface="Courier New" pitchFamily="34" charset="-122"/>
-                <a:cs typeface="Courier New" pitchFamily="34" charset="-120"/>
-              </a:rPr>
-              <a:t>guess = 100000 + 3000 * homes[</a:t>
-            </a:r>
-            <a:endParaRPr lang="en-US" sz="1500" dirty="0"/>
-          </a:p>
-          <a:p>
-            <a:pPr algn="l" indent="0" marL="0">
-              <a:lnSpc>
-                <a:spcPts val="1950"/>
-              </a:lnSpc>
-              <a:buNone/>
-            </a:pPr>
-            <a:r>
-              <a:rPr lang="en-US" sz="1500" dirty="0">
-                <a:solidFill>
-                  <a:srgbClr val="FFFFFF"/>
-                </a:solidFill>
-                <a:latin typeface="Courier New" pitchFamily="34" charset="0"/>
-                <a:ea typeface="Courier New" pitchFamily="34" charset="-122"/>
-                <a:cs typeface="Courier New" pitchFamily="34" charset="-120"/>
-              </a:rPr>
-              <a:t>    </a:t>
-            </a:r>
-            <a:pPr algn="l" indent="0" marL="0">
-              <a:lnSpc>
-                <a:spcPts val="1950"/>
-              </a:lnSpc>
-              <a:buNone/>
-            </a:pPr>
-            <a:r>
-              <a:rPr lang="en-US" sz="1500" dirty="0">
-                <a:solidFill>
-                  <a:srgbClr val="E0BE36"/>
-                </a:solidFill>
-                <a:latin typeface="Courier New" pitchFamily="34" charset="0"/>
-                <a:ea typeface="Courier New" pitchFamily="34" charset="-122"/>
-                <a:cs typeface="Courier New" pitchFamily="34" charset="-120"/>
-              </a:rPr>
-              <a:t>"area_m2"</a:t>
-            </a:r>
-            <a:endParaRPr lang="en-US" sz="1500" dirty="0"/>
-          </a:p>
-          <a:p>
-            <a:pPr algn="l" indent="0" marL="0">
-              <a:lnSpc>
-                <a:spcPts val="1950"/>
-              </a:lnSpc>
-              <a:buNone/>
-            </a:pPr>
-            <a:r>
-              <a:rPr lang="en-US" sz="1500" dirty="0">
-                <a:solidFill>
-                  <a:srgbClr val="FFFFFF"/>
-                </a:solidFill>
-                <a:latin typeface="Courier New" pitchFamily="34" charset="0"/>
-                <a:ea typeface="Courier New" pitchFamily="34" charset="-122"/>
-                <a:cs typeface="Courier New" pitchFamily="34" charset="-120"/>
-              </a:rPr>
-              <a:t>]</a:t>
-            </a:r>
-            <a:endParaRPr lang="en-US" sz="1500" dirty="0"/>
-          </a:p>
-          <a:p>
-            <a:pPr algn="l" indent="0" marL="0">
-              <a:lnSpc>
-                <a:spcPts val="1950"/>
-              </a:lnSpc>
-              <a:buNone/>
-            </a:pPr>
-            <a:r>
-              <a:rPr lang="en-US" sz="1500" dirty="0">
-                <a:solidFill>
-                  <a:srgbClr val="FFFFFF"/>
-                </a:solidFill>
-                <a:latin typeface="Courier New" pitchFamily="34" charset="0"/>
-                <a:ea typeface="Courier New" pitchFamily="34" charset="-122"/>
-                <a:cs typeface="Courier New" pitchFamily="34" charset="-120"/>
-              </a:rPr>
-              <a:t>errors = (</a:t>
-            </a:r>
-            <a:endParaRPr lang="en-US" sz="1500" dirty="0"/>
-          </a:p>
-          <a:p>
-            <a:pPr algn="l" indent="0" marL="0">
-              <a:lnSpc>
-                <a:spcPts val="1950"/>
-              </a:lnSpc>
-              <a:buNone/>
-            </a:pPr>
-            <a:r>
-              <a:rPr lang="en-US" sz="1500" dirty="0">
-                <a:solidFill>
-                  <a:srgbClr val="FFFFFF"/>
-                </a:solidFill>
-                <a:latin typeface="Courier New" pitchFamily="34" charset="0"/>
-                <a:ea typeface="Courier New" pitchFamily="34" charset="-122"/>
-                <a:cs typeface="Courier New" pitchFamily="34" charset="-120"/>
-              </a:rPr>
-              <a:t>    homes[</a:t>
-            </a:r>
-            <a:pPr algn="l" indent="0" marL="0">
-              <a:lnSpc>
-                <a:spcPts val="1950"/>
-              </a:lnSpc>
-              <a:buNone/>
-            </a:pPr>
-            <a:r>
-              <a:rPr lang="en-US" sz="1500" dirty="0">
-                <a:solidFill>
-                  <a:srgbClr val="E0BE36"/>
-                </a:solidFill>
-                <a:latin typeface="Courier New" pitchFamily="34" charset="0"/>
-                <a:ea typeface="Courier New" pitchFamily="34" charset="-122"/>
-                <a:cs typeface="Courier New" pitchFamily="34" charset="-120"/>
-              </a:rPr>
-              <a:t>"rent_ugx"</a:t>
-            </a:r>
-            <a:pPr algn="l" indent="0" marL="0">
-              <a:lnSpc>
-                <a:spcPts val="1950"/>
-              </a:lnSpc>
-              <a:buNone/>
-            </a:pPr>
-            <a:r>
-              <a:rPr lang="en-US" sz="1500" dirty="0">
-                <a:solidFill>
-                  <a:srgbClr val="FFFFFF"/>
-                </a:solidFill>
-                <a:latin typeface="Courier New" pitchFamily="34" charset="0"/>
-                <a:ea typeface="Courier New" pitchFamily="34" charset="-122"/>
-                <a:cs typeface="Courier New" pitchFamily="34" charset="-120"/>
-              </a:rPr>
-              <a:t>] - guess</a:t>
-            </a:r>
-            <a:endParaRPr lang="en-US" sz="1500" dirty="0"/>
-          </a:p>
-          <a:p>
-            <a:pPr algn="l" indent="0" marL="0">
-              <a:lnSpc>
-                <a:spcPts val="1950"/>
-              </a:lnSpc>
-              <a:buNone/>
-            </a:pPr>
-            <a:r>
-              <a:rPr lang="en-US" sz="1500" dirty="0">
-                <a:solidFill>
-                  <a:srgbClr val="FFFFFF"/>
-                </a:solidFill>
-                <a:latin typeface="Courier New" pitchFamily="34" charset="0"/>
-                <a:ea typeface="Courier New" pitchFamily="34" charset="-122"/>
-                <a:cs typeface="Courier New" pitchFamily="34" charset="-120"/>
-              </a:rPr>
-              <a:t>).abs()</a:t>
-            </a:r>
-            <a:endParaRPr lang="en-US" sz="1500" dirty="0"/>
-          </a:p>
-          <a:p>
-            <a:pPr algn="l" indent="0" marL="0">
-              <a:lnSpc>
-                <a:spcPts val="1950"/>
-              </a:lnSpc>
-              <a:buNone/>
-            </a:pPr>
-            <a:r>
-              <a:rPr lang="en-US" sz="1500" dirty="0">
-                <a:solidFill>
-                  <a:srgbClr val="FFFFFF"/>
-                </a:solidFill>
-                <a:latin typeface="Courier New" pitchFamily="34" charset="0"/>
-                <a:ea typeface="Courier New" pitchFamily="34" charset="-122"/>
-                <a:cs typeface="Courier New" pitchFamily="34" charset="-120"/>
-              </a:rPr>
-              <a:t>print(errors.mean())</a:t>
-            </a:r>
-            <a:endParaRPr lang="en-US" sz="1500" dirty="0"/>
-          </a:p>
-        </p:txBody>
-      </p:sp>
+        </p:nvPicPr>
+        <p:blipFill>
+          <a:blip r:embed="rId1"/>
+          <a:stretch>
+            <a:fillRect/>
+          </a:stretch>
+        </p:blipFill>
+        <p:spPr>
+          <a:xfrm>
+            <a:off x="9418320" y="2103120"/>
+            <a:ext cx="1828800" cy="1828800"/>
+          </a:xfrm>
+          <a:prstGeom prst="rect">
+            <a:avLst/>
+          </a:prstGeom>
+        </p:spPr>
+      </p:pic>
       <p:sp>
         <p:nvSpPr>
           <p:cNvPr id="25" name="Slide Number Placeholder 0"/>
@@ -5403,7 +4685,7 @@
                 <a:ea typeface="Courier New" pitchFamily="34" charset="-122"/>
                 <a:cs typeface="Courier New" pitchFamily="34" charset="-120"/>
               </a:rPr>
-              <a:t>    round(model.coef_[0]), round(model.intercept_),</a:t>
+              <a:t>    round(model.coef_[0]), round(model.intercept_), round(fit_error),</a:t>
             </a:r>
             <a:endParaRPr lang="en-US" sz="1800" dirty="0"/>
           </a:p>
@@ -5423,7 +4705,7 @@
                 <a:ea typeface="Courier New" pitchFamily="34" charset="-122"/>
                 <a:cs typeface="Courier New" pitchFamily="34" charset="-120"/>
               </a:rPr>
-              <a:t>    round(fit_error), round(baseline_error)</a:t>
+              <a:t>    round(baseline_error)</a:t>
             </a:r>
             <a:endParaRPr lang="en-US" sz="1800" dirty="0"/>
           </a:p>
@@ -6703,15 +5985,15 @@
           <a:p>
             <a:pPr algn="l" indent="0" marL="0">
               <a:lnSpc>
-                <a:spcPts val="3600"/>
+                <a:spcPts val="3240"/>
               </a:lnSpc>
               <a:spcAft>
-                <a:spcPts val="2520"/>
+                <a:spcPts val="2020"/>
               </a:spcAft>
               <a:buNone/>
             </a:pPr>
             <a:r>
-              <a:rPr lang="en-US" sz="3000" dirty="0">
+              <a:rPr lang="en-US" sz="2700" dirty="0">
                 <a:solidFill>
                   <a:srgbClr val="111111"/>
                 </a:solidFill>
@@ -6719,22 +6001,22 @@
                 <a:ea typeface="Lato" pitchFamily="34" charset="-122"/>
                 <a:cs typeface="Lato" pitchFamily="34" charset="-120"/>
               </a:rPr>
-              <a:t>Use X = [[10], [20], [30], [40]] and y = [100, 200, 300, 400]. Fit a line and predict at 35. Explain in your own words what X, y, fit and predict mean, and why predicting at 1000 is risky.</a:t>
-            </a:r>
-            <a:endParaRPr lang="en-US" sz="3000" dirty="0"/>
-          </a:p>
-          <a:p>
-            <a:pPr algn="l" indent="0" marL="0">
-              <a:lnSpc>
-                <a:spcPts val="3600"/>
+              <a:t>Use X = [[10], [20], [30], [40]] and y = [100, 200, 300, 400].</a:t>
+            </a:r>
+            <a:endParaRPr lang="en-US" sz="2700" dirty="0"/>
+          </a:p>
+          <a:p>
+            <a:pPr algn="l" indent="0" marL="0">
+              <a:lnSpc>
+                <a:spcPts val="3240"/>
               </a:lnSpc>
               <a:spcAft>
-                <a:spcPts val="2520"/>
+                <a:spcPts val="2020"/>
               </a:spcAft>
               <a:buNone/>
             </a:pPr>
             <a:r>
-              <a:rPr lang="en-US" sz="3000" dirty="0">
+              <a:rPr lang="en-US" sz="2700" dirty="0">
                 <a:solidFill>
                   <a:srgbClr val="111111"/>
                 </a:solidFill>
@@ -6742,9 +6024,55 @@
                 <a:ea typeface="Lato" pitchFamily="34" charset="-122"/>
                 <a:cs typeface="Lato" pitchFamily="34" charset="-120"/>
               </a:rPr>
+              <a:t>Fit a line and predict at 35.</a:t>
+            </a:r>
+            <a:endParaRPr lang="en-US" sz="2700" dirty="0"/>
+          </a:p>
+          <a:p>
+            <a:pPr algn="l" indent="0" marL="0">
+              <a:lnSpc>
+                <a:spcPts val="3240"/>
+              </a:lnSpc>
+              <a:spcAft>
+                <a:spcPts val="2020"/>
+              </a:spcAft>
+              <a:buNone/>
+            </a:pPr>
+            <a:r>
+              <a:rPr lang="en-US" sz="2700" dirty="0">
+                <a:solidFill>
+                  <a:srgbClr val="111111"/>
+                </a:solidFill>
+                <a:latin typeface="Lato" pitchFamily="34" charset="0"/>
+                <a:ea typeface="Lato" pitchFamily="34" charset="-122"/>
+                <a:cs typeface="Lato" pitchFamily="34" charset="-120"/>
+              </a:rPr>
+              <a:t>Explain in your own words what X, y, fit and predict mean, and why predicting at 1000 is risky.</a:t>
+            </a:r>
+            <a:endParaRPr lang="en-US" sz="2700" dirty="0"/>
+          </a:p>
+          <a:p>
+            <a:pPr algn="l" indent="0" marL="0">
+              <a:lnSpc>
+                <a:spcPts val="3240"/>
+              </a:lnSpc>
+              <a:spcAft>
+                <a:spcPts val="2020"/>
+              </a:spcAft>
+              <a:buNone/>
+            </a:pPr>
+            <a:r>
+              <a:rPr lang="en-US" sz="2700" dirty="0">
+                <a:solidFill>
+                  <a:srgbClr val="111111"/>
+                </a:solidFill>
+                <a:latin typeface="Lato" pitchFamily="34" charset="0"/>
+                <a:ea typeface="Lato" pitchFamily="34" charset="-122"/>
+                <a:cs typeface="Lato" pitchFamily="34" charset="-120"/>
+              </a:rPr>
               <a:t>Save it as ML14. Write two sentences: what you changed and how you checked it.</a:t>
             </a:r>
-            <a:endParaRPr lang="en-US" sz="3000" dirty="0"/>
+            <a:endParaRPr lang="en-US" sz="2700" dirty="0"/>
           </a:p>
         </p:txBody>
       </p:sp>
